--- a/class - 2/EDGE_2026_Lecture - 2.pptx
+++ b/class - 2/EDGE_2026_Lecture - 2.pptx
@@ -5,10 +5,10 @@
     <p:sldMasterId id="2147483660" r:id="rId4"/>
   </p:sldMasterIdLst>
   <p:notesMasterIdLst>
-    <p:notesMasterId r:id="rId21"/>
+    <p:notesMasterId r:id="rId22"/>
   </p:notesMasterIdLst>
   <p:handoutMasterIdLst>
-    <p:handoutMasterId r:id="rId22"/>
+    <p:handoutMasterId r:id="rId23"/>
   </p:handoutMasterIdLst>
   <p:sldIdLst>
     <p:sldId id="256" r:id="rId5"/>
@@ -23,10 +23,11 @@
     <p:sldId id="289" r:id="rId14"/>
     <p:sldId id="290" r:id="rId15"/>
     <p:sldId id="291" r:id="rId16"/>
-    <p:sldId id="292" r:id="rId17"/>
-    <p:sldId id="293" r:id="rId18"/>
-    <p:sldId id="270" r:id="rId19"/>
-    <p:sldId id="281" r:id="rId20"/>
+    <p:sldId id="295" r:id="rId17"/>
+    <p:sldId id="292" r:id="rId18"/>
+    <p:sldId id="293" r:id="rId19"/>
+    <p:sldId id="270" r:id="rId20"/>
+    <p:sldId id="281" r:id="rId21"/>
   </p:sldIdLst>
   <p:sldSz cx="12192000" cy="6858000"/>
   <p:notesSz cx="9144000" cy="6858000"/>
@@ -233,6 +234,7 @@
     <p1510:client id="{0729AEA1-A084-9DB3-FBF8-E120026B02FD}" v="162" dt="2026-04-19T15:56:31.947"/>
     <p1510:client id="{257877EF-8EBE-8E7C-D6D1-3E7943B46C8C}" v="210" dt="2026-04-19T12:12:11.288"/>
     <p1510:client id="{7D9E385C-1CC3-A14C-C1E2-9972EEB1D612}" v="170" dt="2026-04-19T11:47:34.719"/>
+    <p1510:client id="{A1948A0B-0A06-3B83-36BF-CD644A152503}" v="32" dt="2026-04-21T05:20:38.501"/>
   </p1510:revLst>
 </p1510:revInfo>
 </file>
@@ -3098,7 +3100,7 @@
                 <a:cs typeface="Arial" charset="0"/>
                 <a:sym typeface="Arial" charset="0"/>
               </a:rPr>
-              <a:t>4/19/2026</a:t>
+              <a:t>4/20/2026</a:t>
             </a:fld>
             <a:endParaRPr lang="zh-CN" altLang="en-US" sz="1300">
               <a:latin typeface="Arial" charset="0"/>
@@ -6973,6 +6975,213 @@
         <p:spPr>
           <a:xfrm>
             <a:off x="838201" y="1944688"/>
+            <a:ext cx="4711528" cy="2970212"/>
+          </a:xfrm>
+        </p:spPr>
+        <p:txBody>
+          <a:bodyPr/>
+          <a:lstStyle/>
+          <a:p>
+            <a:pPr marL="457200" indent="-457200">
+              <a:buAutoNum type="arabicPeriod"/>
+            </a:pPr>
+            <a:r>
+              <a:rPr lang="en-US" dirty="0">
+                <a:latin typeface="Arial"/>
+                <a:cs typeface="Arial"/>
+              </a:rPr>
+              <a:t>Add knowledge into Database </a:t>
+            </a:r>
+            <a:br>
+              <a:rPr lang="en-US" dirty="0">
+                <a:latin typeface="Arial"/>
+                <a:cs typeface="Arial"/>
+              </a:rPr>
+            </a:br>
+            <a:r>
+              <a:rPr lang="en-US" dirty="0">
+                <a:latin typeface="Arial"/>
+                <a:cs typeface="Arial"/>
+              </a:rPr>
+              <a:t>'python inde</a:t>
+            </a:r>
+            <a:r>
+              <a:rPr lang="en-US">
+                <a:latin typeface="Arial"/>
+                <a:cs typeface="Arial"/>
+              </a:rPr>
+              <a:t>xing.py'</a:t>
+            </a:r>
+            <a:endParaRPr lang="en-US" dirty="0" err="1"/>
+          </a:p>
+          <a:p>
+            <a:endParaRPr lang="en-US" dirty="0">
+              <a:latin typeface="Arial"/>
+              <a:cs typeface="Arial"/>
+            </a:endParaRPr>
+          </a:p>
+        </p:txBody>
+      </p:sp>
+      <p:pic>
+        <p:nvPicPr>
+          <p:cNvPr id="5" name="Picture 4" descr="A screenshot of a computer screen&#10;&#10;AI-generated content may be incorrect.">
+            <a:extLst>
+              <a:ext uri="{FF2B5EF4-FFF2-40B4-BE49-F238E27FC236}">
+                <a16:creationId xmlns:a16="http://schemas.microsoft.com/office/drawing/2014/main" id="{9C6E2240-2343-5713-F246-F1E78D59A679}"/>
+              </a:ext>
+            </a:extLst>
+          </p:cNvPr>
+          <p:cNvPicPr>
+            <a:picLocks noChangeAspect="1"/>
+          </p:cNvPicPr>
+          <p:nvPr/>
+        </p:nvPicPr>
+        <p:blipFill>
+          <a:blip r:embed="rId2"/>
+          <a:stretch>
+            <a:fillRect/>
+          </a:stretch>
+        </p:blipFill>
+        <p:spPr>
+          <a:xfrm>
+            <a:off x="6844227" y="1223962"/>
+            <a:ext cx="4733411" cy="3143507"/>
+          </a:xfrm>
+          <a:prstGeom prst="rect">
+            <a:avLst/>
+          </a:prstGeom>
+        </p:spPr>
+      </p:pic>
+    </p:spTree>
+    <p:extLst>
+      <p:ext uri="{BB962C8B-B14F-4D97-AF65-F5344CB8AC3E}">
+        <p14:creationId xmlns:p14="http://schemas.microsoft.com/office/powerpoint/2010/main" val="3713184065"/>
+      </p:ext>
+    </p:extLst>
+  </p:cSld>
+  <p:clrMapOvr>
+    <a:masterClrMapping/>
+  </p:clrMapOvr>
+</p:sld>
+</file>
+
+<file path=ppt/slides/slide13.xml><?xml version="1.0" encoding="utf-8"?>
+<p:sld xmlns:a="http://schemas.openxmlformats.org/drawingml/2006/main" xmlns:r="http://schemas.openxmlformats.org/officeDocument/2006/relationships" xmlns:p="http://schemas.openxmlformats.org/presentationml/2006/main">
+  <p:cSld>
+    <p:spTree>
+      <p:nvGrpSpPr>
+        <p:cNvPr id="1" name="">
+          <a:extLst>
+            <a:ext uri="{FF2B5EF4-FFF2-40B4-BE49-F238E27FC236}">
+              <a16:creationId xmlns:a16="http://schemas.microsoft.com/office/drawing/2014/main" id="{5DE6850B-B487-9C4F-F17F-A949726177C9}"/>
+            </a:ext>
+          </a:extLst>
+        </p:cNvPr>
+        <p:cNvGrpSpPr/>
+        <p:nvPr/>
+      </p:nvGrpSpPr>
+      <p:grpSpPr>
+        <a:xfrm>
+          <a:off x="0" y="0"/>
+          <a:ext cx="0" cy="0"/>
+          <a:chOff x="0" y="0"/>
+          <a:chExt cx="0" cy="0"/>
+        </a:xfrm>
+      </p:grpSpPr>
+      <p:sp>
+        <p:nvSpPr>
+          <p:cNvPr id="2" name="Title 1">
+            <a:extLst>
+              <a:ext uri="{FF2B5EF4-FFF2-40B4-BE49-F238E27FC236}">
+                <a16:creationId xmlns:a16="http://schemas.microsoft.com/office/drawing/2014/main" id="{65F5071C-5A76-C23B-9930-4596C60AFDC4}"/>
+              </a:ext>
+            </a:extLst>
+          </p:cNvPr>
+          <p:cNvSpPr>
+            <a:spLocks noGrp="1"/>
+          </p:cNvSpPr>
+          <p:nvPr>
+            <p:ph type="title"/>
+          </p:nvPr>
+        </p:nvSpPr>
+        <p:spPr/>
+        <p:txBody>
+          <a:bodyPr/>
+          <a:lstStyle/>
+          <a:p>
+            <a:r>
+              <a:rPr lang="en-US">
+                <a:latin typeface="Arial"/>
+                <a:cs typeface="Arial"/>
+              </a:rPr>
+              <a:t>Environment Setup (Run)</a:t>
+            </a:r>
+            <a:endParaRPr lang="en-US"/>
+          </a:p>
+        </p:txBody>
+      </p:sp>
+      <p:sp>
+        <p:nvSpPr>
+          <p:cNvPr id="3" name="Slide Number Placeholder 2">
+            <a:extLst>
+              <a:ext uri="{FF2B5EF4-FFF2-40B4-BE49-F238E27FC236}">
+                <a16:creationId xmlns:a16="http://schemas.microsoft.com/office/drawing/2014/main" id="{9310C889-26CF-DA56-6BD9-1353FFD24811}"/>
+              </a:ext>
+            </a:extLst>
+          </p:cNvPr>
+          <p:cNvSpPr>
+            <a:spLocks noGrp="1"/>
+          </p:cNvSpPr>
+          <p:nvPr>
+            <p:ph type="sldNum" idx="12"/>
+          </p:nvPr>
+        </p:nvSpPr>
+        <p:spPr/>
+        <p:txBody>
+          <a:bodyPr/>
+          <a:lstStyle/>
+          <a:p>
+            <a:pPr algn="r"/>
+            <a:fld id="{CAD2D6BD-DE1B-4B5F-8B41-2702339687B9}" type="slidenum">
+              <a:rPr lang="en-US" altLang="zh-CN" smtClean="0">
+                <a:solidFill>
+                  <a:srgbClr val="888888"/>
+                </a:solidFill>
+                <a:ea typeface="Calibri" charset="0"/>
+                <a:sym typeface="Calibri" charset="0"/>
+              </a:rPr>
+              <a:pPr algn="r"/>
+              <a:t>13</a:t>
+            </a:fld>
+            <a:endParaRPr lang="zh-CN" altLang="en-US">
+              <a:solidFill>
+                <a:srgbClr val="888888"/>
+              </a:solidFill>
+              <a:ea typeface="Calibri" charset="0"/>
+              <a:sym typeface="Calibri" charset="0"/>
+            </a:endParaRPr>
+          </a:p>
+        </p:txBody>
+      </p:sp>
+      <p:sp>
+        <p:nvSpPr>
+          <p:cNvPr id="4" name="Text Placeholder 3">
+            <a:extLst>
+              <a:ext uri="{FF2B5EF4-FFF2-40B4-BE49-F238E27FC236}">
+                <a16:creationId xmlns:a16="http://schemas.microsoft.com/office/drawing/2014/main" id="{F5F60707-2C30-590D-5A40-119228E10AA4}"/>
+              </a:ext>
+            </a:extLst>
+          </p:cNvPr>
+          <p:cNvSpPr>
+            <a:spLocks noGrp="1"/>
+          </p:cNvSpPr>
+          <p:nvPr>
+            <p:ph type="body" sz="quarter" idx="13"/>
+          </p:nvPr>
+        </p:nvSpPr>
+        <p:spPr>
+          <a:xfrm>
+            <a:off x="838201" y="1944688"/>
             <a:ext cx="4629150" cy="2970212"/>
           </a:xfrm>
         </p:spPr>
@@ -7032,7 +7241,7 @@
           <p:cNvPr id="7" name="Picture 6" descr="A screenshot of a computer program&#10;&#10;AI-generated content may be incorrect.">
             <a:extLst>
               <a:ext uri="{FF2B5EF4-FFF2-40B4-BE49-F238E27FC236}">
-                <a16:creationId xmlns:a16="http://schemas.microsoft.com/office/drawing/2014/main" id="{25EC3E6C-9DD4-6984-D110-F587F172E16D}"/>
+                <a16:creationId xmlns:a16="http://schemas.microsoft.com/office/drawing/2014/main" id="{0AB1E0D4-E95C-FA49-BA06-674638EB9575}"/>
               </a:ext>
             </a:extLst>
           </p:cNvPr>
@@ -7060,7 +7269,7 @@
     </p:spTree>
     <p:extLst>
       <p:ext uri="{BB962C8B-B14F-4D97-AF65-F5344CB8AC3E}">
-        <p14:creationId xmlns:p14="http://schemas.microsoft.com/office/powerpoint/2010/main" val="3713184065"/>
+        <p14:creationId xmlns:p14="http://schemas.microsoft.com/office/powerpoint/2010/main" val="404876367"/>
       </p:ext>
     </p:extLst>
   </p:cSld>
@@ -7070,7 +7279,7 @@
 </p:sld>
 </file>
 
-<file path=ppt/slides/slide13.xml><?xml version="1.0" encoding="utf-8"?>
+<file path=ppt/slides/slide14.xml><?xml version="1.0" encoding="utf-8"?>
 <p:sld xmlns:a="http://schemas.openxmlformats.org/drawingml/2006/main" xmlns:r="http://schemas.openxmlformats.org/officeDocument/2006/relationships" xmlns:p="http://schemas.openxmlformats.org/presentationml/2006/main">
   <p:cSld>
     <p:spTree>
@@ -7161,7 +7370,7 @@
                 <a:sym typeface="Calibri" charset="0"/>
               </a:rPr>
               <a:pPr algn="r"/>
-              <a:t>13</a:t>
+              <a:t>14</a:t>
             </a:fld>
             <a:endParaRPr lang="zh-CN" altLang="en-US">
               <a:solidFill>
@@ -7295,7 +7504,7 @@
 </p:sld>
 </file>
 
-<file path=ppt/slides/slide14.xml><?xml version="1.0" encoding="utf-8"?>
+<file path=ppt/slides/slide15.xml><?xml version="1.0" encoding="utf-8"?>
 <p:sld xmlns:a="http://schemas.openxmlformats.org/drawingml/2006/main" xmlns:r="http://schemas.openxmlformats.org/officeDocument/2006/relationships" xmlns:p="http://schemas.openxmlformats.org/presentationml/2006/main">
   <p:cSld>
     <p:spTree>
@@ -7381,7 +7590,7 @@
                 <a:sym typeface="Calibri" charset="0"/>
               </a:rPr>
               <a:pPr algn="r"/>
-              <a:t>14</a:t>
+              <a:t>15</a:t>
             </a:fld>
             <a:endParaRPr lang="zh-CN" altLang="en-US">
               <a:solidFill>
@@ -7505,7 +7714,7 @@
 </p:sld>
 </file>
 
-<file path=ppt/slides/slide15.xml><?xml version="1.0" encoding="utf-8"?>
+<file path=ppt/slides/slide16.xml><?xml version="1.0" encoding="utf-8"?>
 <p:sld xmlns:a="http://schemas.openxmlformats.org/drawingml/2006/main" xmlns:r="http://schemas.openxmlformats.org/officeDocument/2006/relationships" xmlns:p="http://schemas.openxmlformats.org/presentationml/2006/main">
   <p:cSld>
     <p:spTree>
@@ -7569,7 +7778,7 @@
                 <a:sym typeface="Calibri" charset="0"/>
               </a:rPr>
               <a:pPr algn="r"/>
-              <a:t>15</a:t>
+              <a:t>16</a:t>
             </a:fld>
             <a:endParaRPr lang="zh-CN" altLang="en-US">
               <a:solidFill>
@@ -7616,7 +7825,7 @@
 </p:sld>
 </file>
 
-<file path=ppt/slides/slide16.xml><?xml version="1.0" encoding="utf-8"?>
+<file path=ppt/slides/slide17.xml><?xml version="1.0" encoding="utf-8"?>
 <p:sld xmlns:a="http://schemas.openxmlformats.org/drawingml/2006/main" xmlns:r="http://schemas.openxmlformats.org/officeDocument/2006/relationships" xmlns:p="http://schemas.openxmlformats.org/presentationml/2006/main">
   <p:cSld>
     <p:spTree>
@@ -7670,7 +7879,7 @@
                 <a:sym typeface="Calibri" charset="0"/>
               </a:rPr>
               <a:pPr algn="r"/>
-              <a:t>16</a:t>
+              <a:t>17</a:t>
             </a:fld>
             <a:endParaRPr lang="zh-CN" altLang="en-US">
               <a:solidFill>

--- a/class - 2/EDGE_2026_Lecture - 2.pptx
+++ b/class - 2/EDGE_2026_Lecture - 2.pptx
@@ -234,7 +234,7 @@
     <p1510:client id="{0729AEA1-A084-9DB3-FBF8-E120026B02FD}" v="162" dt="2026-04-19T15:56:31.947"/>
     <p1510:client id="{257877EF-8EBE-8E7C-D6D1-3E7943B46C8C}" v="210" dt="2026-04-19T12:12:11.288"/>
     <p1510:client id="{7D9E385C-1CC3-A14C-C1E2-9972EEB1D612}" v="170" dt="2026-04-19T11:47:34.719"/>
-    <p1510:client id="{A1948A0B-0A06-3B83-36BF-CD644A152503}" v="32" dt="2026-04-21T05:20:38.501"/>
+    <p1510:client id="{A1948A0B-0A06-3B83-36BF-CD644A152503}" v="40" dt="2026-04-21T05:35:55.411"/>
   </p1510:revLst>
 </p1510:revInfo>
 </file>
@@ -1188,10 +1188,23 @@
             <a:defRPr cap="all"/>
           </a:pPr>
           <a:r>
-            <a:rPr lang="en-US" b="0" i="0"/>
-            <a:t>Md. Golam Mostofa</a:t>
+            <a:rPr lang="en-US" b="0" i="0" dirty="0">
+              <a:latin typeface="Arial"/>
+              <a:cs typeface="Arial"/>
+            </a:rPr>
+            <a:t>Md. Golam </a:t>
           </a:r>
-          <a:endParaRPr lang="en-US"/>
+          <a:r>
+            <a:rPr lang="en-US" b="0" i="0" dirty="0" err="1">
+              <a:latin typeface="Arial"/>
+              <a:cs typeface="Arial"/>
+            </a:rPr>
+            <a:t>Mostofa</a:t>
+          </a:r>
+          <a:endParaRPr lang="en-US" dirty="0">
+            <a:latin typeface="Arial"/>
+            <a:cs typeface="Arial"/>
+          </a:endParaRPr>
         </a:p>
       </dgm:t>
     </dgm:pt>
@@ -1231,10 +1244,10 @@
             <a:defRPr cap="all"/>
           </a:pPr>
           <a:r>
-            <a:rPr lang="en-US" b="0" i="0"/>
+            <a:rPr lang="en-US" b="0" i="0" cap="none"/>
             <a:t>golam.mostofa@bizzntek.com</a:t>
           </a:r>
-          <a:endParaRPr lang="en-US"/>
+          <a:endParaRPr lang="en-US" cap="none"/>
         </a:p>
       </dgm:t>
     </dgm:pt>
@@ -1306,11 +1319,6 @@
           <a:noFill/>
         </a:ln>
       </dgm:spPr>
-      <dgm:extLst>
-        <a:ext uri="{E40237B7-FDA0-4F09-8148-C483321AD2D9}">
-          <dgm14:cNvPr xmlns:dgm14="http://schemas.microsoft.com/office/drawing/2010/diagram" id="0" name="" descr="Doctor"/>
-        </a:ext>
-      </dgm:extLst>
     </dgm:pt>
     <dgm:pt modelId="{D43D5112-3EE7-46CF-A020-32F2ED542861}" type="pres">
       <dgm:prSet presAssocID="{C34C5B9F-75B1-4FE0-945D-A340F2C560AC}" presName="spaceRect" presStyleCnt="0"/>
@@ -1563,10 +1571,23 @@
             <a:defRPr cap="all"/>
           </a:pPr>
           <a:r>
-            <a:rPr lang="en-US" sz="1600" b="0" i="0" kern="1200"/>
-            <a:t>Md. Golam Mostofa</a:t>
+            <a:rPr lang="en-US" sz="1600" b="0" i="0" kern="1200" dirty="0">
+              <a:latin typeface="Arial"/>
+              <a:cs typeface="Arial"/>
+            </a:rPr>
+            <a:t>Md. Golam </a:t>
           </a:r>
-          <a:endParaRPr lang="en-US" sz="1600" kern="1200"/>
+          <a:r>
+            <a:rPr lang="en-US" sz="1600" b="0" i="0" kern="1200" dirty="0" err="1">
+              <a:latin typeface="Arial"/>
+              <a:cs typeface="Arial"/>
+            </a:rPr>
+            <a:t>Mostofa</a:t>
+          </a:r>
+          <a:endParaRPr lang="en-US" sz="1600" kern="1200" dirty="0">
+            <a:latin typeface="Arial"/>
+            <a:cs typeface="Arial"/>
+          </a:endParaRPr>
         </a:p>
       </dsp:txBody>
       <dsp:txXfrm>
@@ -1715,10 +1736,10 @@
             <a:defRPr cap="all"/>
           </a:pPr>
           <a:r>
-            <a:rPr lang="en-US" sz="1600" b="0" i="0" kern="1200"/>
+            <a:rPr lang="en-US" sz="1600" b="0" i="0" kern="1200" cap="none"/>
             <a:t>golam.mostofa@bizzntek.com</a:t>
           </a:r>
-          <a:endParaRPr lang="en-US" sz="1600" kern="1200"/>
+          <a:endParaRPr lang="en-US" sz="1600" kern="1200" cap="none"/>
         </a:p>
       </dsp:txBody>
       <dsp:txXfrm>
@@ -7238,7 +7259,7 @@
       </p:sp>
       <p:pic>
         <p:nvPicPr>
-          <p:cNvPr id="7" name="Picture 6" descr="A screenshot of a computer program&#10;&#10;AI-generated content may be incorrect.">
+          <p:cNvPr id="7" name="Picture 6" descr="A screenshot of a computer&#10;&#10;AI-generated content may be incorrect.">
             <a:extLst>
               <a:ext uri="{FF2B5EF4-FFF2-40B4-BE49-F238E27FC236}">
                 <a16:creationId xmlns:a16="http://schemas.microsoft.com/office/drawing/2014/main" id="{0AB1E0D4-E95C-FA49-BA06-674638EB9575}"/>
@@ -7258,8 +7279,8 @@
         </p:blipFill>
         <p:spPr>
           <a:xfrm>
-            <a:off x="5657850" y="2276630"/>
-            <a:ext cx="5695950" cy="2076139"/>
+            <a:off x="5657850" y="1516327"/>
+            <a:ext cx="5695950" cy="2371366"/>
           </a:xfrm>
           <a:prstGeom prst="rect">
             <a:avLst/>
